--- a/BizClinik_ERP_Explainer_Fresh.pptx
+++ b/BizClinik_ERP_Explainer_Fresh.pptx
@@ -4594,7 +4594,7 @@
                 <a:ea typeface="Calibri" pitchFamily="34" charset="-122"/>
                 <a:cs typeface="Calibri" pitchFamily="34" charset="-120"/>
               </a:rPr>
-              <a:t>Start free. Grow when you're ready.</a:t>
+              <a:t>Start free. Grow when you're ready. Annual billing = 2 months free.</a:t>
             </a:r>
             <a:endParaRPr lang="en-US" sz="2800" dirty="0"/>
           </a:p>
@@ -4949,7 +4949,7 @@
                 <a:ea typeface="Calibri" pitchFamily="34" charset="-122"/>
                 <a:cs typeface="Calibri" pitchFamily="34" charset="-120"/>
               </a:rPr>
-              <a:t>₦15,000/mo</a:t>
+              <a:t>₦50,000/mo</a:t>
             </a:r>
             <a:endParaRPr lang="en-US" sz="1800" dirty="0"/>
           </a:p>
@@ -5034,7 +5034,7 @@
                 <a:ea typeface="Calibri Light" pitchFamily="34" charset="-122"/>
                 <a:cs typeface="Calibri Light" pitchFamily="34" charset="-120"/>
               </a:rPr>
-              <a:t>FIRS e-invoice drafts</a:t>
+              <a:t>Annual: ₦500,000/yr</a:t>
             </a:r>
             <a:endParaRPr lang="en-US" sz="1100" dirty="0"/>
           </a:p>
@@ -5169,7 +5169,7 @@
                 <a:ea typeface="Calibri" pitchFamily="34" charset="-122"/>
                 <a:cs typeface="Calibri" pitchFamily="34" charset="-120"/>
               </a:rPr>
-              <a:t>₦45,000/mo</a:t>
+              <a:t>₦150,000/mo</a:t>
             </a:r>
             <a:endParaRPr lang="en-US" sz="1800" dirty="0"/>
           </a:p>
@@ -5233,7 +5233,7 @@
                 <a:ea typeface="Calibri Light" pitchFamily="34" charset="-122"/>
                 <a:cs typeface="Calibri Light" pitchFamily="34" charset="-120"/>
               </a:rPr>
-              <a:t>Multi-currency</a:t>
+              <a:t>Multi-currency · CRM · API</a:t>
             </a:r>
             <a:endParaRPr lang="en-US" sz="1100" dirty="0"/>
           </a:p>
@@ -5254,7 +5254,7 @@
                 <a:ea typeface="Calibri Light" pitchFamily="34" charset="-122"/>
                 <a:cs typeface="Calibri Light" pitchFamily="34" charset="-120"/>
               </a:rPr>
-              <a:t>API + priority support</a:t>
+              <a:t>Annual: ₦1,500,000/yr</a:t>
             </a:r>
             <a:endParaRPr lang="en-US" sz="1100" dirty="0"/>
           </a:p>
